--- a/gitStarted/notes/Git_Tutorial_Business_Analysts.pptx
+++ b/gitStarted/notes/Git_Tutorial_Business_Analysts.pptx
@@ -637,40 +637,7 @@
               <a:tabLst/>
               <a:defRPr/>
             </a:pPr>
-            <a:r>
-              <a:rPr lang="en-US" dirty="0"/>
-              <a:t>"Branches let you isolate work. You can add a new section like 'root cause' without touching the main version. This is safe and encourages experimentation."</a:t>
-            </a:r>
-          </a:p>
-          <a:p>
-            <a:endParaRPr lang="en-PH" dirty="0"/>
-          </a:p>
-          <a:p>
-            <a:pPr marL="0" marR="0" lvl="0" indent="0" algn="l" defTabSz="914400" rtl="0" eaLnBrk="1" fontAlgn="auto" latinLnBrk="0" hangingPunct="1">
-              <a:lnSpc>
-                <a:spcPct val="100000"/>
-              </a:lnSpc>
-              <a:spcBef>
-                <a:spcPts val="0"/>
-              </a:spcBef>
-              <a:spcAft>
-                <a:spcPts val="0"/>
-              </a:spcAft>
-              <a:buClrTx/>
-              <a:buSzTx/>
-              <a:buFontTx/>
-              <a:buNone/>
-              <a:tabLst/>
-              <a:defRPr/>
-            </a:pPr>
-            <a:r>
-              <a:rPr lang="en-US" b="1" dirty="0"/>
-              <a:t>Purpose:</a:t>
-            </a:r>
-            <a:r>
-              <a:rPr lang="en-US" dirty="0"/>
-              <a:t> Create separate path for a task or idea</a:t>
-            </a:r>
+            <a:endParaRPr lang="en-US" dirty="0"/>
           </a:p>
         </p:txBody>
       </p:sp>
@@ -771,40 +738,7 @@
               <a:tabLst/>
               <a:defRPr/>
             </a:pPr>
-            <a:r>
-              <a:rPr lang="en-US" dirty="0"/>
-              <a:t>"Once you're done with your branch, you merge it back. This integrates your new work into the main branch."</a:t>
-            </a:r>
-          </a:p>
-          <a:p>
-            <a:endParaRPr lang="en-PH" dirty="0"/>
-          </a:p>
-          <a:p>
-            <a:pPr marL="0" marR="0" lvl="0" indent="0" algn="l" defTabSz="914400" rtl="0" eaLnBrk="1" fontAlgn="auto" latinLnBrk="0" hangingPunct="1">
-              <a:lnSpc>
-                <a:spcPct val="100000"/>
-              </a:lnSpc>
-              <a:spcBef>
-                <a:spcPts val="0"/>
-              </a:spcBef>
-              <a:spcAft>
-                <a:spcPts val="0"/>
-              </a:spcAft>
-              <a:buClrTx/>
-              <a:buSzTx/>
-              <a:buFontTx/>
-              <a:buNone/>
-              <a:tabLst/>
-              <a:defRPr/>
-            </a:pPr>
-            <a:r>
-              <a:rPr lang="en-US" b="1" dirty="0"/>
-              <a:t>Purpose:</a:t>
-            </a:r>
-            <a:r>
-              <a:rPr lang="en-US" dirty="0"/>
-              <a:t> Combine changes back into main line</a:t>
-            </a:r>
+            <a:endParaRPr lang="en-US" dirty="0"/>
           </a:p>
         </p:txBody>
       </p:sp>
@@ -888,59 +822,6 @@
           <a:bodyPr/>
           <a:lstStyle/>
           <a:p>
-            <a:pPr marL="0" marR="0" lvl="0" indent="0" algn="l" defTabSz="914400" rtl="0" eaLnBrk="1" fontAlgn="auto" latinLnBrk="0" hangingPunct="1">
-              <a:lnSpc>
-                <a:spcPct val="100000"/>
-              </a:lnSpc>
-              <a:spcBef>
-                <a:spcPts val="0"/>
-              </a:spcBef>
-              <a:spcAft>
-                <a:spcPts val="0"/>
-              </a:spcAft>
-              <a:buClrTx/>
-              <a:buSzTx/>
-              <a:buFontTx/>
-              <a:buNone/>
-              <a:tabLst/>
-              <a:defRPr/>
-            </a:pPr>
-            <a:r>
-              <a:rPr lang="en-US" dirty="0"/>
-              <a:t>"This is how you share your work. Add a remote pointing to GitHub, rename your branch if needed, and push it. Now others can see and collaborate."</a:t>
-            </a:r>
-          </a:p>
-          <a:p>
-            <a:endParaRPr lang="en-PH" dirty="0"/>
-          </a:p>
-          <a:p>
-            <a:pPr marL="0" marR="0" lvl="0" indent="0" algn="l" defTabSz="914400" rtl="0" eaLnBrk="1" fontAlgn="auto" latinLnBrk="0" hangingPunct="1">
-              <a:lnSpc>
-                <a:spcPct val="100000"/>
-              </a:lnSpc>
-              <a:spcBef>
-                <a:spcPts val="0"/>
-              </a:spcBef>
-              <a:spcAft>
-                <a:spcPts val="0"/>
-              </a:spcAft>
-              <a:buClrTx/>
-              <a:buSzTx/>
-              <a:buFontTx/>
-              <a:buNone/>
-              <a:tabLst/>
-              <a:defRPr/>
-            </a:pPr>
-            <a:r>
-              <a:rPr lang="en-US" b="1" dirty="0"/>
-              <a:t>Purpose:</a:t>
-            </a:r>
-            <a:r>
-              <a:rPr lang="en-US" dirty="0"/>
-              <a:t> Push your repo to the cloud (GitHub)</a:t>
-            </a:r>
-          </a:p>
-          <a:p>
             <a:endParaRPr lang="en-PH" dirty="0"/>
           </a:p>
         </p:txBody>
@@ -1025,76 +906,6 @@
           <a:bodyPr/>
           <a:lstStyle/>
           <a:p>
-            <a:pPr marL="0" marR="0" lvl="0" indent="0" algn="l" defTabSz="914400" rtl="0" eaLnBrk="1" fontAlgn="auto" latinLnBrk="0" hangingPunct="1">
-              <a:lnSpc>
-                <a:spcPct val="100000"/>
-              </a:lnSpc>
-              <a:spcBef>
-                <a:spcPts val="0"/>
-              </a:spcBef>
-              <a:spcAft>
-                <a:spcPts val="0"/>
-              </a:spcAft>
-              <a:buClrTx/>
-              <a:buSzTx/>
-              <a:buFontTx/>
-              <a:buNone/>
-              <a:tabLst/>
-              <a:defRPr/>
-            </a:pPr>
-            <a:r>
-              <a:rPr lang="en-US" dirty="0"/>
-              <a:t>"If someone already has a repo on GitHub, you can clone it to get a copy. This is usually how teams start working on shared code.“</a:t>
-            </a:r>
-          </a:p>
-          <a:p>
-            <a:pPr marL="0" marR="0" lvl="0" indent="0" algn="l" defTabSz="914400" rtl="0" eaLnBrk="1" fontAlgn="auto" latinLnBrk="0" hangingPunct="1">
-              <a:lnSpc>
-                <a:spcPct val="100000"/>
-              </a:lnSpc>
-              <a:spcBef>
-                <a:spcPts val="0"/>
-              </a:spcBef>
-              <a:spcAft>
-                <a:spcPts val="0"/>
-              </a:spcAft>
-              <a:buClrTx/>
-              <a:buSzTx/>
-              <a:buFontTx/>
-              <a:buNone/>
-              <a:tabLst/>
-              <a:defRPr/>
-            </a:pPr>
-            <a:endParaRPr lang="en-US" dirty="0"/>
-          </a:p>
-          <a:p>
-            <a:pPr marL="0" marR="0" lvl="0" indent="0" algn="l" defTabSz="914400" rtl="0" eaLnBrk="1" fontAlgn="auto" latinLnBrk="0" hangingPunct="1">
-              <a:lnSpc>
-                <a:spcPct val="100000"/>
-              </a:lnSpc>
-              <a:spcBef>
-                <a:spcPts val="0"/>
-              </a:spcBef>
-              <a:spcAft>
-                <a:spcPts val="0"/>
-              </a:spcAft>
-              <a:buClrTx/>
-              <a:buSzTx/>
-              <a:buFontTx/>
-              <a:buNone/>
-              <a:tabLst/>
-              <a:defRPr/>
-            </a:pPr>
-            <a:r>
-              <a:rPr lang="en-US" b="1" dirty="0"/>
-              <a:t>Purpose:</a:t>
-            </a:r>
-            <a:r>
-              <a:rPr lang="en-US" dirty="0"/>
-              <a:t> Copy a repo from GitHub to your machine</a:t>
-            </a:r>
-          </a:p>
-          <a:p>
             <a:endParaRPr lang="en-PH" dirty="0"/>
           </a:p>
         </p:txBody>
@@ -1179,32 +990,6 @@
           <a:bodyPr/>
           <a:lstStyle/>
           <a:p>
-            <a:pPr marL="0" marR="0" lvl="0" indent="0" algn="l" defTabSz="914400" rtl="0" eaLnBrk="1" fontAlgn="auto" latinLnBrk="0" hangingPunct="1">
-              <a:lnSpc>
-                <a:spcPct val="100000"/>
-              </a:lnSpc>
-              <a:spcBef>
-                <a:spcPts val="0"/>
-              </a:spcBef>
-              <a:spcAft>
-                <a:spcPts val="0"/>
-              </a:spcAft>
-              <a:buClrTx/>
-              <a:buSzTx/>
-              <a:buFontTx/>
-              <a:buNone/>
-              <a:tabLst/>
-              <a:defRPr/>
-            </a:pPr>
-            <a:r>
-              <a:rPr lang="en-US" dirty="0"/>
-              <a:t>"Changes start locally. You commit locally, and then push to the remote GitHub repo. Remote helps with collaboration and backup."</a:t>
-            </a:r>
-          </a:p>
-          <a:p>
-            <a:endParaRPr lang="en-PH" dirty="0"/>
-          </a:p>
-          <a:p>
             <a:endParaRPr lang="en-PH" dirty="0"/>
           </a:p>
         </p:txBody>
@@ -1289,76 +1074,6 @@
           <a:bodyPr/>
           <a:lstStyle/>
           <a:p>
-            <a:pPr marL="0" marR="0" lvl="0" indent="0" algn="l" defTabSz="914400" rtl="0" eaLnBrk="1" fontAlgn="auto" latinLnBrk="0" hangingPunct="1">
-              <a:lnSpc>
-                <a:spcPct val="100000"/>
-              </a:lnSpc>
-              <a:spcBef>
-                <a:spcPts val="0"/>
-              </a:spcBef>
-              <a:spcAft>
-                <a:spcPts val="0"/>
-              </a:spcAft>
-              <a:buClrTx/>
-              <a:buSzTx/>
-              <a:buFontTx/>
-              <a:buNone/>
-              <a:tabLst/>
-              <a:defRPr/>
-            </a:pPr>
-            <a:r>
-              <a:rPr lang="en-US" dirty="0"/>
-              <a:t>"Mistakes happen. You can restore a file to its previous state, or undo a commit if needed. Don’t worry — Git is very forgiving.“</a:t>
-            </a:r>
-          </a:p>
-          <a:p>
-            <a:pPr marL="0" marR="0" lvl="0" indent="0" algn="l" defTabSz="914400" rtl="0" eaLnBrk="1" fontAlgn="auto" latinLnBrk="0" hangingPunct="1">
-              <a:lnSpc>
-                <a:spcPct val="100000"/>
-              </a:lnSpc>
-              <a:spcBef>
-                <a:spcPts val="0"/>
-              </a:spcBef>
-              <a:spcAft>
-                <a:spcPts val="0"/>
-              </a:spcAft>
-              <a:buClrTx/>
-              <a:buSzTx/>
-              <a:buFontTx/>
-              <a:buNone/>
-              <a:tabLst/>
-              <a:defRPr/>
-            </a:pPr>
-            <a:endParaRPr lang="en-US" dirty="0"/>
-          </a:p>
-          <a:p>
-            <a:pPr marL="0" marR="0" lvl="0" indent="0" algn="l" defTabSz="914400" rtl="0" eaLnBrk="1" fontAlgn="auto" latinLnBrk="0" hangingPunct="1">
-              <a:lnSpc>
-                <a:spcPct val="100000"/>
-              </a:lnSpc>
-              <a:spcBef>
-                <a:spcPts val="0"/>
-              </a:spcBef>
-              <a:spcAft>
-                <a:spcPts val="0"/>
-              </a:spcAft>
-              <a:buClrTx/>
-              <a:buSzTx/>
-              <a:buFontTx/>
-              <a:buNone/>
-              <a:tabLst/>
-              <a:defRPr/>
-            </a:pPr>
-            <a:r>
-              <a:rPr lang="en-US" b="1" dirty="0"/>
-              <a:t>Purpose:</a:t>
-            </a:r>
-            <a:r>
-              <a:rPr lang="en-US" dirty="0"/>
-              <a:t> Revert working files or last commit</a:t>
-            </a:r>
-          </a:p>
-          <a:p>
             <a:endParaRPr lang="en-PH" dirty="0"/>
           </a:p>
         </p:txBody>
@@ -1390,6 +1105,90 @@
     <p:extLst>
       <p:ext uri="{BB962C8B-B14F-4D97-AF65-F5344CB8AC3E}">
         <p14:creationId xmlns:p14="http://schemas.microsoft.com/office/powerpoint/2010/main" val="4236531913"/>
+      </p:ext>
+    </p:extLst>
+  </p:cSld>
+  <p:clrMapOvr>
+    <a:masterClrMapping/>
+  </p:clrMapOvr>
+</p:notes>
+</file>
+
+<file path=ppt/notesSlides/notesSlide16.xml><?xml version="1.0" encoding="utf-8"?>
+<p:notes xmlns:a="http://schemas.openxmlformats.org/drawingml/2006/main" xmlns:r="http://schemas.openxmlformats.org/officeDocument/2006/relationships" xmlns:p="http://schemas.openxmlformats.org/presentationml/2006/main">
+  <p:cSld>
+    <p:spTree>
+      <p:nvGrpSpPr>
+        <p:cNvPr id="1" name=""/>
+        <p:cNvGrpSpPr/>
+        <p:nvPr/>
+      </p:nvGrpSpPr>
+      <p:grpSpPr>
+        <a:xfrm>
+          <a:off x="0" y="0"/>
+          <a:ext cx="0" cy="0"/>
+          <a:chOff x="0" y="0"/>
+          <a:chExt cx="0" cy="0"/>
+        </a:xfrm>
+      </p:grpSpPr>
+      <p:sp>
+        <p:nvSpPr>
+          <p:cNvPr id="2" name="Slide Image Placeholder 1"/>
+          <p:cNvSpPr>
+            <a:spLocks noGrp="1" noRot="1" noChangeAspect="1"/>
+          </p:cNvSpPr>
+          <p:nvPr>
+            <p:ph type="sldImg"/>
+          </p:nvPr>
+        </p:nvSpPr>
+        <p:spPr/>
+      </p:sp>
+      <p:sp>
+        <p:nvSpPr>
+          <p:cNvPr id="3" name="Notes Placeholder 2"/>
+          <p:cNvSpPr>
+            <a:spLocks noGrp="1"/>
+          </p:cNvSpPr>
+          <p:nvPr>
+            <p:ph type="body" idx="1"/>
+          </p:nvPr>
+        </p:nvSpPr>
+        <p:spPr/>
+        <p:txBody>
+          <a:bodyPr/>
+          <a:lstStyle/>
+          <a:p>
+            <a:endParaRPr lang="en-PH" dirty="0"/>
+          </a:p>
+        </p:txBody>
+      </p:sp>
+      <p:sp>
+        <p:nvSpPr>
+          <p:cNvPr id="4" name="Slide Number Placeholder 3"/>
+          <p:cNvSpPr>
+            <a:spLocks noGrp="1"/>
+          </p:cNvSpPr>
+          <p:nvPr>
+            <p:ph type="sldNum" sz="quarter" idx="5"/>
+          </p:nvPr>
+        </p:nvSpPr>
+        <p:spPr/>
+        <p:txBody>
+          <a:bodyPr/>
+          <a:lstStyle/>
+          <a:p>
+            <a:fld id="{1BDE35DF-49FC-4C2B-B78F-3A657BDDE401}" type="slidenum">
+              <a:rPr lang="en-PH" smtClean="0"/>
+              <a:t>16</a:t>
+            </a:fld>
+            <a:endParaRPr lang="en-PH"/>
+          </a:p>
+        </p:txBody>
+      </p:sp>
+    </p:spTree>
+    <p:extLst>
+      <p:ext uri="{BB962C8B-B14F-4D97-AF65-F5344CB8AC3E}">
+        <p14:creationId xmlns:p14="http://schemas.microsoft.com/office/powerpoint/2010/main" val="1687005773"/>
       </p:ext>
     </p:extLst>
   </p:cSld>
@@ -1460,10 +1259,7 @@
               <a:tabLst/>
               <a:defRPr/>
             </a:pPr>
-            <a:r>
-              <a:rPr lang="en-US" dirty="0"/>
-              <a:t>"Welcome everyone. Let's start with why Git matters. In remediation projects, we often have multiple stakeholders making changes to reports, SQL scripts, and documentation. Git helps track every change — who made it, when, and why — which helps with collaboration and audit trails."</a:t>
-            </a:r>
+            <a:endParaRPr lang="en-US" dirty="0"/>
           </a:p>
         </p:txBody>
       </p:sp>
@@ -1564,10 +1360,7 @@
               <a:tabLst/>
               <a:defRPr/>
             </a:pPr>
-            <a:r>
-              <a:rPr lang="en-US" dirty="0"/>
-              <a:t>"A Git repository is just a folder that Git is watching. Commits are like save points with messages. Branches let us work independently. Remote is the version stored online, and local is what's on your laptop."</a:t>
-            </a:r>
+            <a:endParaRPr lang="en-US" dirty="0"/>
           </a:p>
         </p:txBody>
       </p:sp>
@@ -1668,10 +1461,7 @@
               <a:tabLst/>
               <a:defRPr/>
             </a:pPr>
-            <a:r>
-              <a:rPr lang="en-US" dirty="0"/>
-              <a:t>"Think of Git as the engine that powers version control. GitHub is the garage where we keep our projects and collaborate. We use Git locally, and sync with GitHub to share."</a:t>
-            </a:r>
+            <a:endParaRPr lang="en-US" dirty="0"/>
           </a:p>
         </p:txBody>
       </p:sp>
@@ -1772,57 +1562,7 @@
               <a:tabLst/>
               <a:defRPr/>
             </a:pPr>
-            <a:r>
-              <a:rPr lang="en-US" dirty="0"/>
-              <a:t>"Before doing anything, configure Git with your name and email. Every change you make will be recorded with this identity, which is critical in team environments.“</a:t>
-            </a:r>
-          </a:p>
-          <a:p>
-            <a:pPr marL="0" marR="0" lvl="0" indent="0" algn="l" defTabSz="914400" rtl="0" eaLnBrk="1" fontAlgn="auto" latinLnBrk="0" hangingPunct="1">
-              <a:lnSpc>
-                <a:spcPct val="100000"/>
-              </a:lnSpc>
-              <a:spcBef>
-                <a:spcPts val="0"/>
-              </a:spcBef>
-              <a:spcAft>
-                <a:spcPts val="0"/>
-              </a:spcAft>
-              <a:buClrTx/>
-              <a:buSzTx/>
-              <a:buFontTx/>
-              <a:buNone/>
-              <a:tabLst/>
-              <a:defRPr/>
-            </a:pPr>
             <a:endParaRPr lang="en-US" dirty="0"/>
-          </a:p>
-          <a:p>
-            <a:pPr marL="0" marR="0" lvl="0" indent="0" algn="l" defTabSz="914400" rtl="0" eaLnBrk="1" fontAlgn="auto" latinLnBrk="0" hangingPunct="1">
-              <a:lnSpc>
-                <a:spcPct val="100000"/>
-              </a:lnSpc>
-              <a:spcBef>
-                <a:spcPts val="0"/>
-              </a:spcBef>
-              <a:spcAft>
-                <a:spcPts val="0"/>
-              </a:spcAft>
-              <a:buClrTx/>
-              <a:buSzTx/>
-              <a:buFontTx/>
-              <a:buNone/>
-              <a:tabLst/>
-              <a:defRPr/>
-            </a:pPr>
-            <a:r>
-              <a:rPr lang="en-US" b="1" dirty="0"/>
-              <a:t>Purpose:</a:t>
-            </a:r>
-            <a:r>
-              <a:rPr lang="en-US" dirty="0"/>
-              <a:t> Set your identity for commits</a:t>
-            </a:r>
           </a:p>
         </p:txBody>
       </p:sp>
@@ -1906,84 +1646,6 @@
           <a:bodyPr/>
           <a:lstStyle/>
           <a:p>
-            <a:pPr marL="0" marR="0" lvl="0" indent="0" algn="l" defTabSz="914400" rtl="0" eaLnBrk="1" fontAlgn="auto" latinLnBrk="0" hangingPunct="1">
-              <a:lnSpc>
-                <a:spcPct val="100000"/>
-              </a:lnSpc>
-              <a:spcBef>
-                <a:spcPts val="0"/>
-              </a:spcBef>
-              <a:spcAft>
-                <a:spcPts val="0"/>
-              </a:spcAft>
-              <a:buClrTx/>
-              <a:buSzTx/>
-              <a:buFontTx/>
-              <a:buNone/>
-              <a:tabLst/>
-              <a:defRPr/>
-            </a:pPr>
-            <a:r>
-              <a:rPr lang="en-US" dirty="0"/>
-              <a:t>"Let’s make a folder for our demo. The git </a:t>
-            </a:r>
-            <a:r>
-              <a:rPr lang="en-US" dirty="0" err="1"/>
-              <a:t>init</a:t>
-            </a:r>
-            <a:r>
-              <a:rPr lang="en-US" dirty="0"/>
-              <a:t> command tells Git to start tracking this folder — now it’s a repository.“</a:t>
-            </a:r>
-          </a:p>
-          <a:p>
-            <a:pPr marL="0" marR="0" lvl="0" indent="0" algn="l" defTabSz="914400" rtl="0" eaLnBrk="1" fontAlgn="auto" latinLnBrk="0" hangingPunct="1">
-              <a:lnSpc>
-                <a:spcPct val="100000"/>
-              </a:lnSpc>
-              <a:spcBef>
-                <a:spcPts val="0"/>
-              </a:spcBef>
-              <a:spcAft>
-                <a:spcPts val="0"/>
-              </a:spcAft>
-              <a:buClrTx/>
-              <a:buSzTx/>
-              <a:buFontTx/>
-              <a:buNone/>
-              <a:tabLst/>
-              <a:defRPr/>
-            </a:pPr>
-            <a:endParaRPr lang="en-US" dirty="0"/>
-          </a:p>
-          <a:p>
-            <a:pPr marL="0" marR="0" lvl="0" indent="0" algn="l" defTabSz="914400" rtl="0" eaLnBrk="1" fontAlgn="auto" latinLnBrk="0" hangingPunct="1">
-              <a:lnSpc>
-                <a:spcPct val="100000"/>
-              </a:lnSpc>
-              <a:spcBef>
-                <a:spcPts val="0"/>
-              </a:spcBef>
-              <a:spcAft>
-                <a:spcPts val="0"/>
-              </a:spcAft>
-              <a:buClrTx/>
-              <a:buSzTx/>
-              <a:buFontTx/>
-              <a:buNone/>
-              <a:tabLst/>
-              <a:defRPr/>
-            </a:pPr>
-            <a:r>
-              <a:rPr lang="en-US" b="1" dirty="0"/>
-              <a:t>Purpose:</a:t>
-            </a:r>
-            <a:r>
-              <a:rPr lang="en-US" dirty="0"/>
-              <a:t> Create a new Git repo in a folder</a:t>
-            </a:r>
-          </a:p>
-          <a:p>
             <a:endParaRPr lang="en-PH" dirty="0"/>
           </a:p>
         </p:txBody>
@@ -2085,57 +1747,7 @@
               <a:tabLst/>
               <a:defRPr/>
             </a:pPr>
-            <a:r>
-              <a:rPr lang="en-US" dirty="0"/>
-              <a:t>"We’ll create a file, check its status, and then stage it for commit. A commit is like a snapshot. The message helps others understand what changed.“</a:t>
-            </a:r>
-          </a:p>
-          <a:p>
-            <a:pPr marL="0" marR="0" lvl="0" indent="0" algn="l" defTabSz="914400" rtl="0" eaLnBrk="1" fontAlgn="auto" latinLnBrk="0" hangingPunct="1">
-              <a:lnSpc>
-                <a:spcPct val="100000"/>
-              </a:lnSpc>
-              <a:spcBef>
-                <a:spcPts val="0"/>
-              </a:spcBef>
-              <a:spcAft>
-                <a:spcPts val="0"/>
-              </a:spcAft>
-              <a:buClrTx/>
-              <a:buSzTx/>
-              <a:buFontTx/>
-              <a:buNone/>
-              <a:tabLst/>
-              <a:defRPr/>
-            </a:pPr>
             <a:endParaRPr lang="en-US" dirty="0"/>
-          </a:p>
-          <a:p>
-            <a:pPr marL="0" marR="0" lvl="0" indent="0" algn="l" defTabSz="914400" rtl="0" eaLnBrk="1" fontAlgn="auto" latinLnBrk="0" hangingPunct="1">
-              <a:lnSpc>
-                <a:spcPct val="100000"/>
-              </a:lnSpc>
-              <a:spcBef>
-                <a:spcPts val="0"/>
-              </a:spcBef>
-              <a:spcAft>
-                <a:spcPts val="0"/>
-              </a:spcAft>
-              <a:buClrTx/>
-              <a:buSzTx/>
-              <a:buFontTx/>
-              <a:buNone/>
-              <a:tabLst/>
-              <a:defRPr/>
-            </a:pPr>
-            <a:r>
-              <a:rPr lang="en-US" b="1" dirty="0"/>
-              <a:t>Purpose:</a:t>
-            </a:r>
-            <a:r>
-              <a:rPr lang="en-US" dirty="0"/>
-              <a:t> Stage and save changes to history</a:t>
-            </a:r>
           </a:p>
         </p:txBody>
       </p:sp>
@@ -2219,96 +1831,6 @@
           <a:bodyPr/>
           <a:lstStyle/>
           <a:p>
-            <a:pPr marL="0" marR="0" lvl="0" indent="0" algn="l" defTabSz="914400" rtl="0" eaLnBrk="1" fontAlgn="auto" latinLnBrk="0" hangingPunct="1">
-              <a:lnSpc>
-                <a:spcPct val="100000"/>
-              </a:lnSpc>
-              <a:spcBef>
-                <a:spcPts val="0"/>
-              </a:spcBef>
-              <a:spcAft>
-                <a:spcPts val="0"/>
-              </a:spcAft>
-              <a:buClrTx/>
-              <a:buSzTx/>
-              <a:buFontTx/>
-              <a:buNone/>
-              <a:tabLst/>
-              <a:defRPr/>
-            </a:pPr>
-            <a:r>
-              <a:rPr lang="en-US" dirty="0"/>
-              <a:t>"Let’s pretend we added findings to our report. We add and commit again. This builds up a clear history of changes over time.“</a:t>
-            </a:r>
-          </a:p>
-          <a:p>
-            <a:pPr marL="0" marR="0" lvl="0" indent="0" algn="l" defTabSz="914400" rtl="0" eaLnBrk="1" fontAlgn="auto" latinLnBrk="0" hangingPunct="1">
-              <a:lnSpc>
-                <a:spcPct val="100000"/>
-              </a:lnSpc>
-              <a:spcBef>
-                <a:spcPts val="0"/>
-              </a:spcBef>
-              <a:spcAft>
-                <a:spcPts val="0"/>
-              </a:spcAft>
-              <a:buClrTx/>
-              <a:buSzTx/>
-              <a:buFontTx/>
-              <a:buNone/>
-              <a:tabLst/>
-              <a:defRPr/>
-            </a:pPr>
-            <a:endParaRPr lang="en-US" dirty="0"/>
-          </a:p>
-          <a:p>
-            <a:pPr marL="0" marR="0" lvl="0" indent="0" algn="l" defTabSz="914400" rtl="0" eaLnBrk="1" fontAlgn="auto" latinLnBrk="0" hangingPunct="1">
-              <a:lnSpc>
-                <a:spcPct val="100000"/>
-              </a:lnSpc>
-              <a:spcBef>
-                <a:spcPts val="0"/>
-              </a:spcBef>
-              <a:spcAft>
-                <a:spcPts val="0"/>
-              </a:spcAft>
-              <a:buClrTx/>
-              <a:buSzTx/>
-              <a:buFontTx/>
-              <a:buNone/>
-              <a:tabLst/>
-              <a:defRPr/>
-            </a:pPr>
-            <a:r>
-              <a:rPr lang="en-US" b="1" dirty="0"/>
-              <a:t>Purpose:</a:t>
-            </a:r>
-            <a:r>
-              <a:rPr lang="en-US" dirty="0"/>
-              <a:t> Make updates and record them</a:t>
-            </a:r>
-          </a:p>
-          <a:p>
-            <a:pPr marL="0" marR="0" lvl="0" indent="0" algn="l" defTabSz="914400" rtl="0" eaLnBrk="1" fontAlgn="auto" latinLnBrk="0" hangingPunct="1">
-              <a:lnSpc>
-                <a:spcPct val="100000"/>
-              </a:lnSpc>
-              <a:spcBef>
-                <a:spcPts val="0"/>
-              </a:spcBef>
-              <a:spcAft>
-                <a:spcPts val="0"/>
-              </a:spcAft>
-              <a:buClrTx/>
-              <a:buSzTx/>
-              <a:buFontTx/>
-              <a:buNone/>
-              <a:tabLst/>
-              <a:defRPr/>
-            </a:pPr>
-            <a:endParaRPr lang="en-US" dirty="0"/>
-          </a:p>
-          <a:p>
             <a:endParaRPr lang="en-PH" dirty="0"/>
           </a:p>
         </p:txBody>
@@ -2392,59 +1914,6 @@
         <p:txBody>
           <a:bodyPr/>
           <a:lstStyle/>
-          <a:p>
-            <a:pPr marL="0" marR="0" lvl="0" indent="0" algn="l" defTabSz="914400" rtl="0" eaLnBrk="1" fontAlgn="auto" latinLnBrk="0" hangingPunct="1">
-              <a:lnSpc>
-                <a:spcPct val="100000"/>
-              </a:lnSpc>
-              <a:spcBef>
-                <a:spcPts val="0"/>
-              </a:spcBef>
-              <a:spcAft>
-                <a:spcPts val="0"/>
-              </a:spcAft>
-              <a:buClrTx/>
-              <a:buSzTx/>
-              <a:buFontTx/>
-              <a:buNone/>
-              <a:tabLst/>
-              <a:defRPr/>
-            </a:pPr>
-            <a:r>
-              <a:rPr lang="en-US" dirty="0"/>
-              <a:t>git log lets you view every commit made. You’ll see who made the change, when, and what the message was. This is useful for backtracking and reviews."</a:t>
-            </a:r>
-          </a:p>
-          <a:p>
-            <a:endParaRPr lang="en-PH" dirty="0"/>
-          </a:p>
-          <a:p>
-            <a:pPr marL="0" marR="0" lvl="0" indent="0" algn="l" defTabSz="914400" rtl="0" eaLnBrk="1" fontAlgn="auto" latinLnBrk="0" hangingPunct="1">
-              <a:lnSpc>
-                <a:spcPct val="100000"/>
-              </a:lnSpc>
-              <a:spcBef>
-                <a:spcPts val="0"/>
-              </a:spcBef>
-              <a:spcAft>
-                <a:spcPts val="0"/>
-              </a:spcAft>
-              <a:buClrTx/>
-              <a:buSzTx/>
-              <a:buFontTx/>
-              <a:buNone/>
-              <a:tabLst/>
-              <a:defRPr/>
-            </a:pPr>
-            <a:r>
-              <a:rPr lang="en-US" b="1" dirty="0"/>
-              <a:t>Purpose:</a:t>
-            </a:r>
-            <a:r>
-              <a:rPr lang="en-US" dirty="0"/>
-              <a:t> See all past commits and messages</a:t>
-            </a:r>
-          </a:p>
           <a:p>
             <a:endParaRPr lang="en-PH" dirty="0"/>
           </a:p>
@@ -9808,7 +9277,7 @@
           </a:prstGeom>
           <a:extLst>
             <a:ext uri="{909E8E84-426E-40dd-AFC4-6F175D3DCCD1}">
-              <a14:hiddenFill xmlns:a14="http://schemas.microsoft.com/office/drawing/2010/main" xmlns="">
+              <a14:hiddenFill xmlns="" xmlns:a14="http://schemas.microsoft.com/office/drawing/2010/main">
                 <a:solidFill>
                   <a:srgbClr val="FFFFFF"/>
                 </a:solidFill>
